--- a/docs/Bedrock_Smart_Router.pptx
+++ b/docs/Bedrock_Smart_Router.pptx
@@ -305,7 +305,7 @@
           <a:p>
             <a:fld id="{5BCAD085-E8A6-8845-BD4E-CB4CCA059FC4}" type="datetimeFigureOut">
               <a:rPr lang="en-US" smtClean="0"/>
-              <a:t>5/18/26</a:t>
+              <a:t>8/13/26</a:t>
             </a:fld>
             <a:endParaRPr lang="en-US"/>
           </a:p>
@@ -473,7 +473,7 @@
           <a:p>
             <a:fld id="{5BCAD085-E8A6-8845-BD4E-CB4CCA059FC4}" type="datetimeFigureOut">
               <a:rPr lang="en-US" smtClean="0"/>
-              <a:t>5/18/26</a:t>
+              <a:t>8/13/26</a:t>
             </a:fld>
             <a:endParaRPr lang="en-US"/>
           </a:p>
@@ -651,7 +651,7 @@
           <a:p>
             <a:fld id="{5BCAD085-E8A6-8845-BD4E-CB4CCA059FC4}" type="datetimeFigureOut">
               <a:rPr lang="en-US" smtClean="0"/>
-              <a:t>5/18/26</a:t>
+              <a:t>8/13/26</a:t>
             </a:fld>
             <a:endParaRPr lang="en-US"/>
           </a:p>
@@ -819,7 +819,7 @@
           <a:p>
             <a:fld id="{5BCAD085-E8A6-8845-BD4E-CB4CCA059FC4}" type="datetimeFigureOut">
               <a:rPr lang="en-US" smtClean="0"/>
-              <a:t>5/18/26</a:t>
+              <a:t>8/13/26</a:t>
             </a:fld>
             <a:endParaRPr lang="en-US"/>
           </a:p>
@@ -1064,7 +1064,7 @@
           <a:p>
             <a:fld id="{5BCAD085-E8A6-8845-BD4E-CB4CCA059FC4}" type="datetimeFigureOut">
               <a:rPr lang="en-US" smtClean="0"/>
-              <a:t>5/18/26</a:t>
+              <a:t>8/13/26</a:t>
             </a:fld>
             <a:endParaRPr lang="en-US"/>
           </a:p>
@@ -1349,7 +1349,7 @@
           <a:p>
             <a:fld id="{5BCAD085-E8A6-8845-BD4E-CB4CCA059FC4}" type="datetimeFigureOut">
               <a:rPr lang="en-US" smtClean="0"/>
-              <a:t>5/18/26</a:t>
+              <a:t>8/13/26</a:t>
             </a:fld>
             <a:endParaRPr lang="en-US"/>
           </a:p>
@@ -1768,7 +1768,7 @@
           <a:p>
             <a:fld id="{5BCAD085-E8A6-8845-BD4E-CB4CCA059FC4}" type="datetimeFigureOut">
               <a:rPr lang="en-US" smtClean="0"/>
-              <a:t>5/18/26</a:t>
+              <a:t>8/13/26</a:t>
             </a:fld>
             <a:endParaRPr lang="en-US"/>
           </a:p>
@@ -1885,7 +1885,7 @@
           <a:p>
             <a:fld id="{5BCAD085-E8A6-8845-BD4E-CB4CCA059FC4}" type="datetimeFigureOut">
               <a:rPr lang="en-US" smtClean="0"/>
-              <a:t>5/18/26</a:t>
+              <a:t>8/13/26</a:t>
             </a:fld>
             <a:endParaRPr lang="en-US"/>
           </a:p>
@@ -1980,7 +1980,7 @@
           <a:p>
             <a:fld id="{5BCAD085-E8A6-8845-BD4E-CB4CCA059FC4}" type="datetimeFigureOut">
               <a:rPr lang="en-US" smtClean="0"/>
-              <a:t>5/18/26</a:t>
+              <a:t>8/13/26</a:t>
             </a:fld>
             <a:endParaRPr lang="en-US"/>
           </a:p>
@@ -2255,7 +2255,7 @@
           <a:p>
             <a:fld id="{5BCAD085-E8A6-8845-BD4E-CB4CCA059FC4}" type="datetimeFigureOut">
               <a:rPr lang="en-US" smtClean="0"/>
-              <a:t>5/18/26</a:t>
+              <a:t>8/13/26</a:t>
             </a:fld>
             <a:endParaRPr lang="en-US"/>
           </a:p>
@@ -2507,7 +2507,7 @@
           <a:p>
             <a:fld id="{5BCAD085-E8A6-8845-BD4E-CB4CCA059FC4}" type="datetimeFigureOut">
               <a:rPr lang="en-US" smtClean="0"/>
-              <a:t>5/18/26</a:t>
+              <a:t>8/13/26</a:t>
             </a:fld>
             <a:endParaRPr lang="en-US"/>
           </a:p>
@@ -2718,7 +2718,7 @@
           <a:p>
             <a:fld id="{5BCAD085-E8A6-8845-BD4E-CB4CCA059FC4}" type="datetimeFigureOut">
               <a:rPr lang="en-US" smtClean="0"/>
-              <a:t>5/18/26</a:t>
+              <a:t>8/13/26</a:t>
             </a:fld>
             <a:endParaRPr lang="en-US"/>
           </a:p>
@@ -3162,7 +3162,7 @@
         <p:spPr>
           <a:xfrm>
             <a:off x="731520" y="1188720"/>
-            <a:ext cx="9144000" cy="731520"/>
+            <a:ext cx="9144000" cy="523220"/>
           </a:xfrm>
           <a:prstGeom prst="rect">
             <a:avLst/>
@@ -3183,7 +3183,33 @@
               </a:defRPr>
             </a:pPr>
             <a:r>
-              <a:t>Amazon Bedrock offers 65+ models across 8 families. Picking the right one for each request</a:t>
+              <a:t>Amazon Bedrock offers </a:t>
+            </a:r>
+            <a:r>
+              <a:rPr lang="en-US" sz="1400">
+                <a:solidFill>
+                  <a:schemeClr val="accent6"/>
+                </a:solidFill>
+              </a:rPr>
+              <a:t>70</a:t>
+            </a:r>
+            <a:r>
+              <a:rPr sz="1400">
+                <a:solidFill>
+                  <a:schemeClr val="accent6"/>
+                </a:solidFill>
+              </a:rPr>
+              <a:t>+ models </a:t>
+            </a:r>
+            <a:r>
+              <a:t>across </a:t>
+            </a:r>
+            <a:r>
+              <a:rPr lang="en-US"/>
+              <a:t>14</a:t>
+            </a:r>
+            <a:r>
+              <a:t> families. Picking the right one for each request</a:t>
             </a:r>
             <a:br/>
             <a:r>
@@ -4135,11 +4161,11 @@
               <a:t>Drop-in replacement </a:t>
             </a:r>
             <a:r>
-              <a:rPr lang="en-US" sz="1400" dirty="0"/>
+              <a:rPr lang="en-US" sz="1400"/>
               <a:t>for </a:t>
             </a:r>
             <a:r>
-              <a:rPr lang="en-US" sz="1400" dirty="0">
+              <a:rPr lang="en-US" sz="1400">
                 <a:solidFill>
                   <a:schemeClr val="accent6"/>
                 </a:solidFill>
@@ -4147,32 +4173,28 @@
               <a:t>converse</a:t>
             </a:r>
             <a:r>
+              <a:rPr lang="en-US" sz="1400"/>
+              <a:t> &amp; </a:t>
+            </a:r>
+            <a:r>
+              <a:rPr lang="en-US" sz="1400">
+                <a:solidFill>
+                  <a:schemeClr val="accent6"/>
+                </a:solidFill>
+              </a:rPr>
+              <a:t>chat completion </a:t>
+            </a:r>
+            <a:r>
+              <a:rPr lang="en-US" sz="1400">
+                <a:solidFill>
+                  <a:srgbClr val="9CA3AF"/>
+                </a:solidFill>
+              </a:rPr>
+              <a:t>APIs </a:t>
+            </a:r>
+            <a:r>
               <a:rPr lang="en-US" sz="1400" dirty="0"/>
-              <a:t>() &amp; </a:t>
-            </a:r>
-            <a:r>
-              <a:rPr lang="en-US" sz="1400" dirty="0" err="1">
-                <a:solidFill>
-                  <a:schemeClr val="accent6"/>
-                </a:solidFill>
-              </a:rPr>
-              <a:t>converse</a:t>
-            </a:r>
-            <a:r>
-              <a:rPr lang="en-US" sz="1400" dirty="0" err="1"/>
-              <a:t>_</a:t>
-            </a:r>
-            <a:r>
-              <a:rPr lang="en-US" sz="1400" dirty="0" err="1">
-                <a:solidFill>
-                  <a:schemeClr val="accent6"/>
-                </a:solidFill>
-              </a:rPr>
-              <a:t>stream</a:t>
-            </a:r>
-            <a:r>
-              <a:rPr lang="en-US" sz="1400" dirty="0"/>
-              <a:t>() with support for </a:t>
+              <a:t>with support for </a:t>
             </a:r>
             <a:r>
               <a:rPr lang="en-US" sz="1400" dirty="0">
@@ -4192,10 +4214,10 @@
       </p:sp>
       <p:pic>
         <p:nvPicPr>
-          <p:cNvPr id="17" name="Picture 16">
+          <p:cNvPr id="4" name="Picture 3">
             <a:extLst>
               <a:ext uri="{FF2B5EF4-FFF2-40B4-BE49-F238E27FC236}">
-                <a16:creationId xmlns:a16="http://schemas.microsoft.com/office/drawing/2014/main" id="{C22A516A-5750-14F6-94F8-9D586CCA1628}"/>
+                <a16:creationId xmlns:a16="http://schemas.microsoft.com/office/drawing/2014/main" id="{9E12FE96-71BC-6A58-CF49-EBB87ACF6DCF}"/>
               </a:ext>
             </a:extLst>
           </p:cNvPr>
@@ -4212,8 +4234,8 @@
         </p:blipFill>
         <p:spPr>
           <a:xfrm>
-            <a:off x="484214" y="2169140"/>
-            <a:ext cx="11220396" cy="3488763"/>
+            <a:off x="373199" y="2446639"/>
+            <a:ext cx="11442426" cy="2718486"/>
           </a:xfrm>
           <a:prstGeom prst="rect">
             <a:avLst/>
@@ -4421,10 +4443,10 @@
       </p:sp>
       <p:pic>
         <p:nvPicPr>
-          <p:cNvPr id="18" name="Picture 17">
+          <p:cNvPr id="4" name="Picture 3">
             <a:extLst>
               <a:ext uri="{FF2B5EF4-FFF2-40B4-BE49-F238E27FC236}">
-                <a16:creationId xmlns:a16="http://schemas.microsoft.com/office/drawing/2014/main" id="{C7949EC9-A425-5D16-A80D-07DB0034682F}"/>
+                <a16:creationId xmlns:a16="http://schemas.microsoft.com/office/drawing/2014/main" id="{F54203A8-B077-0E3C-8B92-4590A203A1F6}"/>
               </a:ext>
             </a:extLst>
           </p:cNvPr>
@@ -4441,8 +4463,8 @@
         </p:blipFill>
         <p:spPr>
           <a:xfrm>
-            <a:off x="475249" y="1681831"/>
-            <a:ext cx="11238326" cy="3494338"/>
+            <a:off x="157507" y="1940157"/>
+            <a:ext cx="11873810" cy="2820974"/>
           </a:xfrm>
           <a:prstGeom prst="rect">
             <a:avLst/>
